--- a/海報.pptx
+++ b/海報.pptx
@@ -31,6 +31,17 @@
     </p:ext>
   </p:extLst>
 </p:presentation>
+</file>
+
+<file path=ppt/revisionInfo.xml><?xml version="1.0" encoding="utf-8"?>
+<p1510:revInfo xmlns:a="http://schemas.openxmlformats.org/drawingml/2006/main" xmlns:r="http://schemas.openxmlformats.org/officeDocument/2006/relationships" xmlns:p1510="http://schemas.microsoft.com/office/powerpoint/2015/10/main">
+  <p1510:revLst>
+    <p1510:client id="{3A077B34-CCBE-486A-B00F-B5453FD00839}" v="43" dt="2026-05-27T19:11:26.413"/>
+    <p1510:client id="{5DC282DA-2BC7-46DD-BACF-BA2CD88CF85A}" v="17" dt="2026-05-28T01:23:10.199"/>
+    <p1510:client id="{F09C72D7-F528-45D2-BE1D-AA0A990301FB}" v="296" dt="2026-05-27T16:41:37.353"/>
+    <p1510:client id="{F3CB8BBB-CC0B-4023-8E4E-A00D7047418D}" v="16" dt="2026-05-27T17:41:50.261"/>
+  </p1510:revLst>
+</p1510:revInfo>
 </file>
 
 <file path=ppt/slideLayouts/slideLayout1.xml><?xml version="1.0" encoding="utf-8"?>
@@ -178,7 +189,7 @@
           <a:p>
             <a:fld id="{1D8BD707-D9CF-40AE-B4C6-C98DA3205C09}" type="datetimeFigureOut">
               <a:rPr lang="en-US"/>
-              <a:t>5/26/2026</a:t>
+              <a:t>5/27/2026</a:t>
             </a:fld>
             <a:endParaRPr lang="en-US"/>
           </a:p>
@@ -349,7 +360,7 @@
           <a:p>
             <a:fld id="{1D8BD707-D9CF-40AE-B4C6-C98DA3205C09}" type="datetimeFigureOut">
               <a:rPr lang="en-US"/>
-              <a:t>5/26/2026</a:t>
+              <a:t>5/27/2026</a:t>
             </a:fld>
             <a:endParaRPr lang="en-US"/>
           </a:p>
@@ -563,7 +574,7 @@
           <a:p>
             <a:fld id="{1D8BD707-D9CF-40AE-B4C6-C98DA3205C09}" type="datetimeFigureOut">
               <a:rPr lang="en-US"/>
-              <a:t>5/26/2026</a:t>
+              <a:t>5/27/2026</a:t>
             </a:fld>
             <a:endParaRPr lang="en-US"/>
           </a:p>
@@ -711,7 +722,7 @@
           <a:p>
             <a:fld id="{1D8BD707-D9CF-40AE-B4C6-C98DA3205C09}" type="datetimeFigureOut">
               <a:rPr lang="en-US"/>
-              <a:t>5/26/2026</a:t>
+              <a:t>5/27/2026</a:t>
             </a:fld>
             <a:endParaRPr lang="en-US"/>
           </a:p>
@@ -830,7 +841,7 @@
           <a:p>
             <a:fld id="{1D8BD707-D9CF-40AE-B4C6-C98DA3205C09}" type="datetimeFigureOut">
               <a:rPr lang="en-US"/>
-              <a:t>5/26/2026</a:t>
+              <a:t>5/27/2026</a:t>
             </a:fld>
             <a:endParaRPr lang="en-US"/>
           </a:p>
@@ -7098,7 +7109,7 @@
           <a:p>
             <a:fld id="{1D8BD707-D9CF-40AE-B4C6-C98DA3205C09}" type="datetimeFigureOut">
               <a:rPr lang="en-US"/>
-              <a:t>5/26/2026</a:t>
+              <a:t>5/27/2026</a:t>
             </a:fld>
             <a:endParaRPr lang="en-US"/>
           </a:p>
@@ -7337,7 +7348,7 @@
           </a:prstGeom>
         </p:spPr>
         <p:txBody>
-          <a:bodyPr vert="horz" wrap="square" lIns="0" tIns="17780" rIns="0" bIns="0" rtlCol="0">
+          <a:bodyPr vert="horz" wrap="square" lIns="0" tIns="17780" rIns="0" bIns="0" rtlCol="0" anchor="t">
             <a:spAutoFit/>
           </a:bodyPr>
           <a:lstStyle/>
@@ -7348,149 +7359,19 @@
               </a:spcBef>
             </a:pPr>
             <a:r>
-              <a:rPr sz="8000" spc="409" dirty="0">
+              <a:rPr lang="en-US" sz="8000" spc="409" dirty="0" err="1">
                 <a:latin typeface="+mj-ea"/>
               </a:rPr>
-              <a:t>DeepFake</a:t>
+              <a:t>Deepfake</a:t>
             </a:r>
             <a:r>
-              <a:rPr sz="8000" spc="-10" dirty="0">
+              <a:rPr sz="8000" spc="-10" dirty="0" err="1">
                 <a:latin typeface="+mj-ea"/>
               </a:rPr>
               <a:t>人臉偵測的應用程式</a:t>
             </a:r>
-          </a:p>
-        </p:txBody>
-      </p:sp>
-      <p:sp>
-        <p:nvSpPr>
-          <p:cNvPr id="3" name="object 3"/>
-          <p:cNvSpPr txBox="1"/>
-          <p:nvPr/>
-        </p:nvSpPr>
-        <p:spPr>
-          <a:xfrm>
-            <a:off x="4017962" y="1941568"/>
-            <a:ext cx="10384456" cy="550792"/>
-          </a:xfrm>
-          <a:prstGeom prst="rect">
-            <a:avLst/>
-          </a:prstGeom>
-        </p:spPr>
-        <p:txBody>
-          <a:bodyPr vert="horz" wrap="square" lIns="0" tIns="12065" rIns="0" bIns="0" rtlCol="0">
-            <a:spAutoFit/>
-          </a:bodyPr>
-          <a:lstStyle/>
-          <a:p>
-            <a:pPr marL="12700">
-              <a:spcBef>
-                <a:spcPts val="95"/>
-              </a:spcBef>
-            </a:pPr>
-            <a:r>
-              <a:rPr sz="3500" spc="215" dirty="0">
-                <a:solidFill>
-                  <a:srgbClr val="FEFEFE"/>
-                </a:solidFill>
-                <a:latin typeface="+mj-ea"/>
-                <a:ea typeface="+mj-ea"/>
-                <a:cs typeface="SimSun"/>
-              </a:rPr>
-              <a:t>DeepFake</a:t>
-            </a:r>
-            <a:r>
-              <a:rPr sz="3500" spc="-869" dirty="0">
-                <a:solidFill>
-                  <a:srgbClr val="FEFEFE"/>
-                </a:solidFill>
-                <a:latin typeface="+mj-ea"/>
-                <a:ea typeface="+mj-ea"/>
-                <a:cs typeface="SimSun"/>
-              </a:rPr>
-              <a:t> </a:t>
-            </a:r>
-            <a:r>
-              <a:rPr sz="3500" spc="-10" dirty="0">
-                <a:solidFill>
-                  <a:srgbClr val="FEFEFE"/>
-                </a:solidFill>
-                <a:latin typeface="+mj-ea"/>
-                <a:ea typeface="+mj-ea"/>
-                <a:cs typeface="SimSun"/>
-              </a:rPr>
-              <a:t>Detection</a:t>
-            </a:r>
-            <a:r>
-              <a:rPr sz="3500" spc="-865" dirty="0">
-                <a:solidFill>
-                  <a:srgbClr val="FEFEFE"/>
-                </a:solidFill>
-                <a:latin typeface="+mj-ea"/>
-                <a:ea typeface="+mj-ea"/>
-                <a:cs typeface="SimSun"/>
-              </a:rPr>
-              <a:t> </a:t>
-            </a:r>
-            <a:r>
-              <a:rPr sz="3500" spc="75" dirty="0">
-                <a:solidFill>
-                  <a:srgbClr val="FEFEFE"/>
-                </a:solidFill>
-                <a:latin typeface="+mj-ea"/>
-                <a:ea typeface="+mj-ea"/>
-                <a:cs typeface="SimSun"/>
-              </a:rPr>
-              <a:t>Face</a:t>
-            </a:r>
-            <a:r>
-              <a:rPr sz="3500" spc="-865" dirty="0">
-                <a:solidFill>
-                  <a:srgbClr val="FEFEFE"/>
-                </a:solidFill>
-                <a:latin typeface="+mj-ea"/>
-                <a:ea typeface="+mj-ea"/>
-                <a:cs typeface="SimSun"/>
-              </a:rPr>
-              <a:t> </a:t>
-            </a:r>
-            <a:r>
-              <a:rPr sz="3500" spc="215" dirty="0">
-                <a:solidFill>
-                  <a:srgbClr val="FEFEFE"/>
-                </a:solidFill>
-                <a:latin typeface="+mj-ea"/>
-                <a:ea typeface="+mj-ea"/>
-                <a:cs typeface="SimSun"/>
-              </a:rPr>
-              <a:t>image</a:t>
-            </a:r>
-            <a:r>
-              <a:rPr sz="3500" spc="-865" dirty="0">
-                <a:solidFill>
-                  <a:srgbClr val="FEFEFE"/>
-                </a:solidFill>
-                <a:latin typeface="+mj-ea"/>
-                <a:ea typeface="+mj-ea"/>
-                <a:cs typeface="SimSun"/>
-              </a:rPr>
-              <a:t> </a:t>
-            </a:r>
-            <a:r>
-              <a:rPr sz="3500" spc="-30" dirty="0">
-                <a:solidFill>
-                  <a:srgbClr val="FEFEFE"/>
-                </a:solidFill>
-                <a:latin typeface="+mj-ea"/>
-                <a:ea typeface="+mj-ea"/>
-                <a:cs typeface="SimSun"/>
-              </a:rPr>
-              <a:t>Application</a:t>
-            </a:r>
-            <a:endParaRPr sz="3500" dirty="0">
+            <a:endParaRPr lang="en-US" sz="8000" spc="-10" dirty="0" err="1">
               <a:latin typeface="+mj-ea"/>
-              <a:ea typeface="+mj-ea"/>
-              <a:cs typeface="SimSun"/>
             </a:endParaRPr>
           </a:p>
         </p:txBody>
@@ -7503,9 +7384,9 @@
         </p:nvGrpSpPr>
         <p:grpSpPr>
           <a:xfrm>
-            <a:off x="1122362" y="4312040"/>
+            <a:off x="1122362" y="4510506"/>
             <a:ext cx="19354800" cy="9253855"/>
-            <a:chOff x="470726" y="3653015"/>
+            <a:chOff x="85613" y="3752248"/>
             <a:chExt cx="13410565" cy="9253855"/>
           </a:xfrm>
         </p:grpSpPr>
@@ -7517,7 +7398,7 @@
           </p:nvSpPr>
           <p:spPr>
             <a:xfrm>
-              <a:off x="470726" y="3653015"/>
+              <a:off x="85613" y="3752248"/>
               <a:ext cx="13410565" cy="9253855"/>
             </a:xfrm>
             <a:custGeom>
@@ -8013,8 +7894,8 @@
         </p:nvSpPr>
         <p:spPr>
           <a:xfrm>
-            <a:off x="2971118" y="5450830"/>
-            <a:ext cx="622300" cy="1611916"/>
+            <a:off x="2076200" y="6267959"/>
+            <a:ext cx="1322825" cy="772904"/>
           </a:xfrm>
           <a:prstGeom prst="rect">
             <a:avLst/>
@@ -8061,8 +7942,8 @@
         </p:nvSpPr>
         <p:spPr>
           <a:xfrm>
-            <a:off x="2971118" y="9916570"/>
-            <a:ext cx="622300" cy="1611916"/>
+            <a:off x="2076200" y="10733700"/>
+            <a:ext cx="1322825" cy="772904"/>
           </a:xfrm>
           <a:prstGeom prst="rect">
             <a:avLst/>
@@ -8101,42 +7982,6 @@
           </a:p>
         </p:txBody>
       </p:sp>
-      <p:pic>
-        <p:nvPicPr>
-          <p:cNvPr id="22" name="圖片 21">
-            <a:extLst>
-              <a:ext uri="{FF2B5EF4-FFF2-40B4-BE49-F238E27FC236}">
-                <a16:creationId xmlns:a16="http://schemas.microsoft.com/office/drawing/2014/main" id="{73516C05-AE67-5491-A722-9E513D2C48CE}"/>
-              </a:ext>
-            </a:extLst>
-          </p:cNvPr>
-          <p:cNvPicPr>
-            <a:picLocks noChangeAspect="1"/>
-          </p:cNvPicPr>
-          <p:nvPr/>
-        </p:nvPicPr>
-        <p:blipFill>
-          <a:blip r:embed="rId4">
-            <a:extLst>
-              <a:ext uri="{28A0092B-C50C-407E-A947-70E740481C1C}">
-                <a14:useLocalDpi xmlns:a14="http://schemas.microsoft.com/office/drawing/2010/main" val="0"/>
-              </a:ext>
-            </a:extLst>
-          </a:blip>
-          <a:stretch>
-            <a:fillRect/>
-          </a:stretch>
-        </p:blipFill>
-        <p:spPr>
-          <a:xfrm>
-            <a:off x="569911" y="15035842"/>
-            <a:ext cx="20459701" cy="11288111"/>
-          </a:xfrm>
-          <a:prstGeom prst="rect">
-            <a:avLst/>
-          </a:prstGeom>
-        </p:spPr>
-      </p:pic>
       <p:sp>
         <p:nvSpPr>
           <p:cNvPr id="23" name="矩形 22">
@@ -8202,15 +8047,15 @@
         </p:nvSpPr>
         <p:spPr>
           <a:xfrm>
-            <a:off x="4277857" y="9034211"/>
-            <a:ext cx="15337518" cy="4000500"/>
+            <a:off x="3711571" y="10085566"/>
+            <a:ext cx="15765619" cy="2627451"/>
           </a:xfrm>
           <a:prstGeom prst="rect">
             <a:avLst/>
           </a:prstGeom>
         </p:spPr>
         <p:txBody>
-          <a:bodyPr vert="horz" wrap="square" lIns="0" tIns="12700" rIns="0" bIns="0" rtlCol="0">
+          <a:bodyPr vert="horz" wrap="square" lIns="0" tIns="12700" rIns="0" bIns="0" rtlCol="0" anchor="t">
             <a:spAutoFit/>
           </a:bodyPr>
           <a:lstStyle/>
@@ -8222,11 +8067,173 @@
               <a:spcBef>
                 <a:spcPts val="100"/>
               </a:spcBef>
-              <a:buFont typeface="Arial" panose="020B0604020202020204" pitchFamily="34" charset="0"/>
-              <a:buChar char="•"/>
+              <a:buFont typeface="Wingdings"/>
+              <a:buChar char="v"/>
             </a:pPr>
             <a:r>
-              <a:rPr sz="3750" spc="-335" dirty="0">
+              <a:rPr lang="en-US" sz="3750" dirty="0">
+                <a:solidFill>
+                  <a:schemeClr val="bg1"/>
+                </a:solidFill>
+                <a:latin typeface="+mj-ea"/>
+                <a:ea typeface="+mj-ea"/>
+              </a:rPr>
+              <a:t>j</a:t>
+            </a:r>
+            <a:r>
+              <a:rPr lang="ja-JP" sz="3750" dirty="0">
+                <a:solidFill>
+                  <a:schemeClr val="bg1"/>
+                </a:solidFill>
+              </a:rPr>
+              <a:t>我們希望能夠開發一款</a:t>
+            </a:r>
+            <a:r>
+              <a:rPr sz="3750" dirty="0">
+                <a:solidFill>
+                  <a:schemeClr val="bg1"/>
+                </a:solidFill>
+                <a:latin typeface="+mj-ea"/>
+                <a:ea typeface="+mj-ea"/>
+              </a:rPr>
+              <a:t> </a:t>
+            </a:r>
+            <a:r>
+              <a:rPr lang="en-US" sz="3750" dirty="0" err="1">
+                <a:solidFill>
+                  <a:schemeClr val="bg1"/>
+                </a:solidFill>
+                <a:latin typeface="+mj-ea"/>
+                <a:ea typeface="+mj-ea"/>
+              </a:rPr>
+              <a:t>Windows</a:t>
+            </a:r>
+            <a:r>
+              <a:rPr sz="3750" dirty="0" err="1">
+                <a:solidFill>
+                  <a:schemeClr val="bg1"/>
+                </a:solidFill>
+                <a:latin typeface="+mj-ea"/>
+                <a:ea typeface="+mj-ea"/>
+              </a:rPr>
+              <a:t>即時偵測工具</a:t>
+            </a:r>
+            <a:r>
+              <a:rPr sz="3750" dirty="0">
+                <a:solidFill>
+                  <a:schemeClr val="bg1"/>
+                </a:solidFill>
+                <a:latin typeface="+mj-ea"/>
+                <a:ea typeface="+mj-ea"/>
+              </a:rPr>
+              <a:t>，</a:t>
+            </a:r>
+            <a:r>
+              <a:rPr lang="ja-JP" sz="3750" dirty="0">
+                <a:solidFill>
+                  <a:schemeClr val="bg1"/>
+                </a:solidFill>
+              </a:rPr>
+              <a:t>讓使用者瀏覽畫面時能進行</a:t>
+            </a:r>
+            <a:r>
+              <a:rPr sz="3750" dirty="0">
+                <a:solidFill>
+                  <a:schemeClr val="bg1"/>
+                </a:solidFill>
+                <a:latin typeface="+mj-ea"/>
+                <a:ea typeface="+mj-ea"/>
+              </a:rPr>
+              <a:t> </a:t>
+            </a:r>
+            <a:r>
+              <a:rPr lang="ja-JP" sz="3750" dirty="0">
+                <a:solidFill>
+                  <a:schemeClr val="bg1"/>
+                </a:solidFill>
+              </a:rPr>
+              <a:t>即時</a:t>
+            </a:r>
+            <a:r>
+              <a:rPr lang="ja-JP" altLang="en-US" sz="3750" dirty="0">
+                <a:solidFill>
+                  <a:schemeClr val="bg1"/>
+                </a:solidFill>
+                <a:latin typeface="+mj-ea"/>
+                <a:ea typeface="+mj-ea"/>
+              </a:rPr>
+              <a:t> </a:t>
+            </a:r>
+            <a:r>
+              <a:rPr sz="3750" dirty="0">
+                <a:solidFill>
+                  <a:schemeClr val="bg1"/>
+                </a:solidFill>
+                <a:latin typeface="+mj-ea"/>
+                <a:ea typeface="+mj-ea"/>
+              </a:rPr>
+              <a:t>Deepfake </a:t>
+            </a:r>
+            <a:r>
+              <a:rPr sz="3750" dirty="0" err="1">
+                <a:solidFill>
+                  <a:schemeClr val="bg1"/>
+                </a:solidFill>
+                <a:latin typeface="+mj-ea"/>
+                <a:ea typeface="+mj-ea"/>
+              </a:rPr>
+              <a:t>偵測</a:t>
+            </a:r>
+            <a:r>
+              <a:rPr sz="3750" dirty="0">
+                <a:solidFill>
+                  <a:schemeClr val="bg1"/>
+                </a:solidFill>
+                <a:latin typeface="+mj-ea"/>
+                <a:ea typeface="+mj-ea"/>
+              </a:rPr>
+              <a:t>。</a:t>
+            </a:r>
+            <a:endParaRPr lang="en-US" sz="3750">
+              <a:solidFill>
+                <a:schemeClr val="bg1"/>
+              </a:solidFill>
+              <a:latin typeface="+mj-ea"/>
+              <a:ea typeface="+mj-ea"/>
+            </a:endParaRPr>
+          </a:p>
+          <a:p>
+            <a:pPr marL="584200" marR="5080" indent="-571500">
+              <a:lnSpc>
+                <a:spcPct val="115900"/>
+              </a:lnSpc>
+              <a:buFont typeface="Wingdings"/>
+              <a:buChar char="v"/>
+            </a:pPr>
+            <a:r>
+              <a:rPr lang="ja-JP" sz="3750" spc="-90" dirty="0">
+                <a:solidFill>
+                  <a:srgbClr val="FEFEFE"/>
+                </a:solidFill>
+                <a:latin typeface="ＭＳ Ｐゴシック"/>
+                <a:ea typeface="ＭＳ Ｐゴシック"/>
+                <a:cs typeface="SimSun"/>
+              </a:rPr>
+              <a:t>結合人臉偵測與</a:t>
+            </a:r>
+            <a:r>
+              <a:rPr lang="ja-JP" altLang="en-US" sz="3750" spc="-90" dirty="0">
+                <a:solidFill>
+                  <a:srgbClr val="FEFEFE"/>
+                </a:solidFill>
+                <a:latin typeface="ＭＳ Ｐゴシック"/>
+                <a:ea typeface="ＭＳ Ｐゴシック"/>
+                <a:cs typeface="SimSun"/>
+              </a:rPr>
+              <a:t>  </a:t>
+            </a:r>
+            <a:r>
+              <a:rPr sz="3750" spc="200" dirty="0" err="1">
                 <a:solidFill>
                   <a:srgbClr val="FEFEFE"/>
                 </a:solidFill>
@@ -8234,10 +8241,10 @@
                 <a:ea typeface="+mj-ea"/>
                 <a:cs typeface="SimSun"/>
               </a:rPr>
-              <a:t>開發 </a:t>
+              <a:t>FakeFormer</a:t>
             </a:r>
             <a:r>
-              <a:rPr sz="3750" spc="395" dirty="0">
+              <a:rPr sz="3750" spc="200" dirty="0">
                 <a:solidFill>
                   <a:srgbClr val="FEFEFE"/>
                 </a:solidFill>
@@ -8245,10 +8252,50 @@
                 <a:ea typeface="+mj-ea"/>
                 <a:cs typeface="SimSun"/>
               </a:rPr>
-              <a:t>Windows</a:t>
+              <a:t> </a:t>
             </a:r>
             <a:r>
-              <a:rPr sz="3750" spc="-95" dirty="0">
+              <a:rPr lang="ja-JP" sz="3750" spc="200" dirty="0">
+                <a:solidFill>
+                  <a:srgbClr val="FEFEFE"/>
+                </a:solidFill>
+                <a:cs typeface="SimSun"/>
+              </a:rPr>
+              <a:t> </a:t>
+            </a:r>
+            <a:r>
+              <a:rPr lang="ja-JP" sz="3750" spc="-270" dirty="0">
+                <a:solidFill>
+                  <a:srgbClr val="FEFEFE"/>
+                </a:solidFill>
+                <a:cs typeface="SimSun"/>
+              </a:rPr>
+              <a:t> </a:t>
+            </a:r>
+            <a:r>
+              <a:rPr lang="ja-JP" altLang="en-US" sz="3750" spc="-270" dirty="0">
+                <a:solidFill>
+                  <a:srgbClr val="FEFEFE"/>
+                </a:solidFill>
+                <a:latin typeface="ＭＳ Ｐゴシック"/>
+                <a:ea typeface="ＭＳ Ｐゴシック"/>
+                <a:cs typeface="SimSun"/>
+              </a:rPr>
+              <a:t>模</a:t>
+            </a:r>
+            <a:r>
+              <a:rPr lang="ja-JP" sz="3750" spc="-270" dirty="0">
+                <a:solidFill>
+                  <a:srgbClr val="FEFEFE"/>
+                </a:solidFill>
+                <a:latin typeface="ＭＳ Ｐゴシック"/>
+                <a:ea typeface="ＭＳ Ｐゴシック"/>
+                <a:cs typeface="SimSun"/>
+              </a:rPr>
+              <a:t>型</a:t>
+            </a:r>
+            <a:r>
+              <a:rPr sz="3750" spc="-270" dirty="0">
                 <a:solidFill>
                   <a:srgbClr val="FEFEFE"/>
                 </a:solidFill>
@@ -8256,10 +8303,21 @@
                 <a:ea typeface="+mj-ea"/>
                 <a:cs typeface="SimSun"/>
               </a:rPr>
-              <a:t> 即時偵測工具，讓系統能在使用</a:t>
+              <a:t>，</a:t>
             </a:r>
             <a:r>
-              <a:rPr sz="3750" spc="-120" dirty="0">
+              <a:rPr lang="ja-JP" sz="3750" spc="-15" dirty="0">
+                <a:solidFill>
+                  <a:srgbClr val="FEFEFE"/>
+                </a:solidFill>
+                <a:latin typeface="ＭＳ Ｐゴシック"/>
+                <a:ea typeface="ＭＳ Ｐゴシック"/>
+                <a:cs typeface="SimSun"/>
+              </a:rPr>
+              <a:t>分析畫面中的人臉是否疑似遭到偽造。</a:t>
+            </a:r>
+            <a:r>
+              <a:rPr sz="3750" spc="-75" dirty="0" err="1">
                 <a:solidFill>
                   <a:srgbClr val="FEFEFE"/>
                 </a:solidFill>
@@ -8267,7 +8325,18 @@
                 <a:ea typeface="+mj-ea"/>
                 <a:cs typeface="SimSun"/>
               </a:rPr>
-              <a:t>者瀏覽畫面時進行 </a:t>
+              <a:t>當偵測到疑似</a:t>
+            </a:r>
+            <a:r>
+              <a:rPr sz="3750" spc="-75" dirty="0">
+                <a:solidFill>
+                  <a:srgbClr val="FEFEFE"/>
+                </a:solidFill>
+                <a:latin typeface="+mj-ea"/>
+                <a:ea typeface="+mj-ea"/>
+                <a:cs typeface="SimSun"/>
+              </a:rPr>
+              <a:t> </a:t>
             </a:r>
             <a:r>
               <a:rPr sz="3750" spc="165" dirty="0">
@@ -8281,7 +8350,7 @@
               <a:t>Deepfake</a:t>
             </a:r>
             <a:r>
-              <a:rPr sz="3750" spc="-270" dirty="0">
+              <a:rPr lang="en-US" sz="3750" spc="165" dirty="0">
                 <a:solidFill>
                   <a:srgbClr val="FEFEFE"/>
                 </a:solidFill>
@@ -8289,24 +8358,10 @@
                 <a:ea typeface="+mj-ea"/>
                 <a:cs typeface="SimSun"/>
               </a:rPr>
-              <a:t> 偵測。</a:t>
+              <a:t> </a:t>
             </a:r>
-            <a:endParaRPr sz="3750" dirty="0">
-              <a:latin typeface="+mj-ea"/>
-              <a:ea typeface="+mj-ea"/>
-              <a:cs typeface="SimSun"/>
-            </a:endParaRPr>
-          </a:p>
-          <a:p>
-            <a:pPr marL="584200" marR="5080" indent="-571500">
-              <a:lnSpc>
-                <a:spcPct val="115900"/>
-              </a:lnSpc>
-              <a:buFont typeface="Arial" panose="020B0604020202020204" pitchFamily="34" charset="0"/>
-              <a:buChar char="•"/>
-            </a:pPr>
             <a:r>
-              <a:rPr sz="3750" spc="-90" dirty="0">
+              <a:rPr sz="3750" spc="-520" dirty="0" err="1">
                 <a:solidFill>
                   <a:srgbClr val="FEFEFE"/>
                 </a:solidFill>
@@ -8314,10 +8369,10 @@
                 <a:ea typeface="+mj-ea"/>
                 <a:cs typeface="SimSun"/>
               </a:rPr>
-              <a:t>結合螢幕擷取、人臉偵測與 </a:t>
+              <a:t>人</a:t>
             </a:r>
             <a:r>
-              <a:rPr sz="3750" spc="200" dirty="0">
+              <a:rPr sz="3750" spc="-15" dirty="0" err="1">
                 <a:solidFill>
                   <a:srgbClr val="FEFEFE"/>
                 </a:solidFill>
@@ -8325,18 +8380,7 @@
                 <a:ea typeface="+mj-ea"/>
                 <a:cs typeface="SimSun"/>
               </a:rPr>
-              <a:t>FakeFormer</a:t>
-            </a:r>
-            <a:r>
-              <a:rPr sz="3750" spc="-270" dirty="0">
-                <a:solidFill>
-                  <a:srgbClr val="FEFEFE"/>
-                </a:solidFill>
-                <a:latin typeface="+mj-ea"/>
-                <a:ea typeface="+mj-ea"/>
-                <a:cs typeface="SimSun"/>
-              </a:rPr>
-              <a:t> 模型，</a:t>
+              <a:t>臉時，跳出警示視窗提醒使用者</a:t>
             </a:r>
             <a:r>
               <a:rPr sz="3750" spc="-15" dirty="0">
@@ -8347,65 +8391,7 @@
                 <a:ea typeface="+mj-ea"/>
                 <a:cs typeface="SimSun"/>
               </a:rPr>
-              <a:t>分析畫面中的人臉是否疑似遭到偽造。</a:t>
-            </a:r>
-            <a:endParaRPr sz="3750" dirty="0">
-              <a:latin typeface="+mj-ea"/>
-              <a:ea typeface="+mj-ea"/>
-              <a:cs typeface="SimSun"/>
-            </a:endParaRPr>
-          </a:p>
-          <a:p>
-            <a:pPr marL="584200" marR="97790" indent="-571500">
-              <a:lnSpc>
-                <a:spcPct val="115900"/>
-              </a:lnSpc>
-              <a:buFont typeface="Arial" panose="020B0604020202020204" pitchFamily="34" charset="0"/>
-              <a:buChar char="•"/>
-            </a:pPr>
-            <a:r>
-              <a:rPr sz="3750" spc="-75" dirty="0">
-                <a:solidFill>
-                  <a:srgbClr val="FEFEFE"/>
-                </a:solidFill>
-                <a:latin typeface="+mj-ea"/>
-                <a:ea typeface="+mj-ea"/>
-                <a:cs typeface="SimSun"/>
-              </a:rPr>
-              <a:t>建立警示提醒機制，當偵測到疑似 </a:t>
-            </a:r>
-            <a:r>
-              <a:rPr sz="3750" spc="165" dirty="0">
-                <a:solidFill>
-                  <a:srgbClr val="FEFEFE"/>
-                </a:solidFill>
-                <a:latin typeface="+mj-ea"/>
-                <a:ea typeface="+mj-ea"/>
-                <a:cs typeface="SimSun"/>
-              </a:rPr>
-              <a:t>Deepfake</a:t>
-            </a:r>
-            <a:r>
-              <a:rPr sz="3750" spc="-520" dirty="0">
-                <a:solidFill>
-                  <a:srgbClr val="FEFEFE"/>
-                </a:solidFill>
-                <a:latin typeface="+mj-ea"/>
-                <a:ea typeface="+mj-ea"/>
-                <a:cs typeface="SimSun"/>
-              </a:rPr>
-              <a:t> 人</a:t>
-            </a:r>
-            <a:r>
-              <a:rPr sz="3750" spc="-15" dirty="0">
-                <a:solidFill>
-                  <a:srgbClr val="FEFEFE"/>
-                </a:solidFill>
-                <a:latin typeface="+mj-ea"/>
-                <a:ea typeface="+mj-ea"/>
-                <a:cs typeface="SimSun"/>
-              </a:rPr>
-              <a:t>臉時，跳出警示視窗提醒使用者。</a:t>
+              <a:t>。</a:t>
             </a:r>
             <a:endParaRPr sz="3750" dirty="0">
               <a:latin typeface="+mj-ea"/>
@@ -8423,15 +8409,15 @@
         </p:nvSpPr>
         <p:spPr>
           <a:xfrm>
-            <a:off x="4277856" y="4725158"/>
-            <a:ext cx="15337518" cy="4000500"/>
+            <a:off x="3713247" y="5394467"/>
+            <a:ext cx="15765616" cy="3296865"/>
           </a:xfrm>
           <a:prstGeom prst="rect">
             <a:avLst/>
           </a:prstGeom>
         </p:spPr>
         <p:txBody>
-          <a:bodyPr vert="horz" wrap="square" lIns="0" tIns="12700" rIns="0" bIns="0" rtlCol="0">
+          <a:bodyPr vert="horz" wrap="square" lIns="0" tIns="12700" rIns="0" bIns="0" rtlCol="0" anchor="t">
             <a:spAutoFit/>
           </a:bodyPr>
           <a:lstStyle/>
@@ -8443,8 +8429,8 @@
               <a:spcBef>
                 <a:spcPts val="100"/>
               </a:spcBef>
-              <a:buFont typeface="Arial" panose="020B0604020202020204" pitchFamily="34" charset="0"/>
-              <a:buChar char="•"/>
+              <a:buFont typeface="Wingdings" panose="020B0604020202020204" pitchFamily="34" charset="0"/>
+              <a:buChar char="v"/>
             </a:pPr>
             <a:r>
               <a:rPr sz="3750" spc="165" dirty="0">
@@ -8466,7 +8452,29 @@
                 <a:ea typeface="+mj-ea"/>
                 <a:cs typeface="SimSun"/>
               </a:rPr>
-              <a:t> 技術快速發展，已能高度擬真地偽造人</a:t>
+              <a:t> </a:t>
+            </a:r>
+            <a:r>
+              <a:rPr sz="3750" spc="-85" dirty="0" err="1">
+                <a:solidFill>
+                  <a:srgbClr val="FEFEFE"/>
+                </a:solidFill>
+                <a:latin typeface="+mj-ea"/>
+                <a:ea typeface="+mj-ea"/>
+                <a:cs typeface="SimSun"/>
+              </a:rPr>
+              <a:t>技術快速發展，已能高度擬真地偽造人</a:t>
+            </a:r>
+            <a:r>
+              <a:rPr sz="3750" spc="-15" dirty="0" err="1">
+                <a:solidFill>
+                  <a:srgbClr val="FEFEFE"/>
+                </a:solidFill>
+                <a:latin typeface="+mj-ea"/>
+                <a:ea typeface="+mj-ea"/>
+                <a:cs typeface="SimSun"/>
+              </a:rPr>
+              <a:t>臉表情、嘴型與臉部特徵。一般使用者難以辨識真偽，僅靠肉眼觀看影像或影片，容易誤信偽造內容</a:t>
             </a:r>
             <a:r>
               <a:rPr sz="3750" spc="-15" dirty="0">
@@ -8477,9 +8485,9 @@
                 <a:ea typeface="+mj-ea"/>
                 <a:cs typeface="SimSun"/>
               </a:rPr>
-              <a:t>臉表情、嘴型與臉部特徵。</a:t>
+              <a:t>。</a:t>
             </a:r>
-            <a:endParaRPr sz="3750" dirty="0">
+            <a:endParaRPr lang="en-US" sz="3750" dirty="0">
               <a:latin typeface="+mj-ea"/>
               <a:ea typeface="+mj-ea"/>
               <a:cs typeface="SimSun"/>
@@ -8490,9 +8498,20 @@
               <a:lnSpc>
                 <a:spcPct val="115900"/>
               </a:lnSpc>
-              <a:buFont typeface="Arial" panose="020B0604020202020204" pitchFamily="34" charset="0"/>
-              <a:buChar char="•"/>
+              <a:buFont typeface="Wingdings" panose="020B0604020202020204" pitchFamily="34" charset="0"/>
+              <a:buChar char="v"/>
             </a:pPr>
+            <a:r>
+              <a:rPr sz="3750" spc="-15" dirty="0" err="1">
+                <a:solidFill>
+                  <a:srgbClr val="FEFEFE"/>
+                </a:solidFill>
+                <a:latin typeface="+mj-ea"/>
+                <a:ea typeface="+mj-ea"/>
+                <a:cs typeface="SimSun"/>
+              </a:rPr>
+              <a:t>現有偵測方式缺乏即時性，多需手動匯入影像或影片，較不適合日常瀏覽情境使用</a:t>
+            </a:r>
             <a:r>
               <a:rPr sz="3750" spc="-15" dirty="0">
                 <a:solidFill>
@@ -8502,32 +8521,7 @@
                 <a:ea typeface="+mj-ea"/>
                 <a:cs typeface="SimSun"/>
               </a:rPr>
-              <a:t>一般使用者難以辨識真偽，僅靠肉眼觀看影像或影片，容易誤信偽造內容。</a:t>
-            </a:r>
-            <a:endParaRPr sz="3750" dirty="0">
-              <a:latin typeface="+mj-ea"/>
-              <a:ea typeface="+mj-ea"/>
-              <a:cs typeface="SimSun"/>
-            </a:endParaRPr>
-          </a:p>
-          <a:p>
-            <a:pPr marL="584200" marR="287655" indent="-571500">
-              <a:lnSpc>
-                <a:spcPct val="115900"/>
-              </a:lnSpc>
-              <a:buFont typeface="Arial" panose="020B0604020202020204" pitchFamily="34" charset="0"/>
-              <a:buChar char="•"/>
-            </a:pPr>
-            <a:r>
-              <a:rPr sz="3750" spc="-15" dirty="0">
-                <a:solidFill>
-                  <a:srgbClr val="FEFEFE"/>
-                </a:solidFill>
-                <a:latin typeface="+mj-ea"/>
-                <a:ea typeface="+mj-ea"/>
-                <a:cs typeface="SimSun"/>
-              </a:rPr>
-              <a:t>現有偵測方式缺乏即時性，多需手動匯入影像或影片，較不適合日常瀏覽情境使用。</a:t>
+              <a:t>。</a:t>
             </a:r>
             <a:endParaRPr sz="3750" dirty="0">
               <a:latin typeface="+mj-ea"/>
@@ -8553,7 +8547,7 @@
         </p:nvCxnSpPr>
         <p:spPr>
           <a:xfrm>
-            <a:off x="1122362" y="8836123"/>
+            <a:off x="1122362" y="9133823"/>
             <a:ext cx="19354800" cy="0"/>
           </a:xfrm>
           <a:prstGeom prst="line">
@@ -8594,7 +8588,7 @@
         </p:nvSpPr>
         <p:spPr>
           <a:xfrm>
-            <a:off x="6769893" y="13866693"/>
+            <a:off x="6769893" y="14331676"/>
             <a:ext cx="8059738" cy="860492"/>
           </a:xfrm>
           <a:prstGeom prst="rect">
@@ -8800,6 +8794,91 @@
           </a:p>
         </p:txBody>
       </p:sp>
+      <p:sp>
+        <p:nvSpPr>
+          <p:cNvPr id="13" name="TextBox 12">
+            <a:extLst>
+              <a:ext uri="{FF2B5EF4-FFF2-40B4-BE49-F238E27FC236}">
+                <a16:creationId xmlns:a16="http://schemas.microsoft.com/office/drawing/2014/main" id="{61DB5325-C024-2868-617B-69B9FC648245}"/>
+              </a:ext>
+            </a:extLst>
+          </p:cNvPr>
+          <p:cNvSpPr txBox="1"/>
+          <p:nvPr/>
+        </p:nvSpPr>
+        <p:spPr>
+          <a:xfrm>
+            <a:off x="6255932" y="1909810"/>
+            <a:ext cx="12745665" cy="984885"/>
+          </a:xfrm>
+          <a:prstGeom prst="rect">
+            <a:avLst/>
+          </a:prstGeom>
+          <a:noFill/>
+        </p:spPr>
+        <p:txBody>
+          <a:bodyPr rot="0" spcFirstLastPara="0" vertOverflow="overflow" horzOverflow="overflow" vert="horz" wrap="square" lIns="91440" tIns="45720" rIns="91440" bIns="45720" numCol="1" spcCol="0" rtlCol="0" fromWordArt="0" anchor="t" anchorCtr="0" forceAA="0" compatLnSpc="1">
+            <a:prstTxWarp prst="textNoShape">
+              <a:avLst/>
+            </a:prstTxWarp>
+            <a:spAutoFit/>
+          </a:bodyPr>
+          <a:lstStyle/>
+          <a:p>
+            <a:r>
+              <a:rPr lang="en-US" sz="4000" dirty="0">
+                <a:solidFill>
+                  <a:srgbClr val="FEFEFE"/>
+                </a:solidFill>
+              </a:rPr>
+              <a:t>Deepfake   Face Detection </a:t>
+            </a:r>
+            <a:r>
+              <a:rPr lang="en-US" sz="4000">
+                <a:solidFill>
+                  <a:srgbClr val="FEFEFE"/>
+                </a:solidFill>
+              </a:rPr>
+              <a:t>Application Program</a:t>
+            </a:r>
+            <a:endParaRPr lang="en-US" dirty="0" err="1"/>
+          </a:p>
+          <a:p>
+            <a:pPr algn="ctr"/>
+            <a:endParaRPr lang="en-US"/>
+          </a:p>
+        </p:txBody>
+      </p:sp>
+      <p:pic>
+        <p:nvPicPr>
+          <p:cNvPr id="3" name="Picture 2">
+            <a:extLst>
+              <a:ext uri="{FF2B5EF4-FFF2-40B4-BE49-F238E27FC236}">
+                <a16:creationId xmlns:a16="http://schemas.microsoft.com/office/drawing/2014/main" id="{427E424B-7DA0-B01A-A17B-50A4ABC80BE7}"/>
+              </a:ext>
+            </a:extLst>
+          </p:cNvPr>
+          <p:cNvPicPr>
+            <a:picLocks noChangeAspect="1"/>
+          </p:cNvPicPr>
+          <p:nvPr/>
+        </p:nvPicPr>
+        <p:blipFill>
+          <a:blip r:embed="rId4"/>
+          <a:stretch>
+            <a:fillRect/>
+          </a:stretch>
+        </p:blipFill>
+        <p:spPr>
+          <a:xfrm>
+            <a:off x="331022" y="15714005"/>
+            <a:ext cx="20904804" cy="10255884"/>
+          </a:xfrm>
+          <a:prstGeom prst="rect">
+            <a:avLst/>
+          </a:prstGeom>
+        </p:spPr>
+      </p:pic>
     </p:spTree>
   </p:cSld>
   <p:clrMapOvr>

--- a/海報.pptx
+++ b/海報.pptx
@@ -189,7 +189,7 @@
           <a:p>
             <a:fld id="{1D8BD707-D9CF-40AE-B4C6-C98DA3205C09}" type="datetimeFigureOut">
               <a:rPr lang="en-US"/>
-              <a:t>5/27/2026</a:t>
+              <a:t>5/28/2026</a:t>
             </a:fld>
             <a:endParaRPr lang="en-US"/>
           </a:p>
@@ -360,7 +360,7 @@
           <a:p>
             <a:fld id="{1D8BD707-D9CF-40AE-B4C6-C98DA3205C09}" type="datetimeFigureOut">
               <a:rPr lang="en-US"/>
-              <a:t>5/27/2026</a:t>
+              <a:t>5/28/2026</a:t>
             </a:fld>
             <a:endParaRPr lang="en-US"/>
           </a:p>
@@ -574,7 +574,7 @@
           <a:p>
             <a:fld id="{1D8BD707-D9CF-40AE-B4C6-C98DA3205C09}" type="datetimeFigureOut">
               <a:rPr lang="en-US"/>
-              <a:t>5/27/2026</a:t>
+              <a:t>5/28/2026</a:t>
             </a:fld>
             <a:endParaRPr lang="en-US"/>
           </a:p>
@@ -722,7 +722,7 @@
           <a:p>
             <a:fld id="{1D8BD707-D9CF-40AE-B4C6-C98DA3205C09}" type="datetimeFigureOut">
               <a:rPr lang="en-US"/>
-              <a:t>5/27/2026</a:t>
+              <a:t>5/28/2026</a:t>
             </a:fld>
             <a:endParaRPr lang="en-US"/>
           </a:p>
@@ -841,7 +841,7 @@
           <a:p>
             <a:fld id="{1D8BD707-D9CF-40AE-B4C6-C98DA3205C09}" type="datetimeFigureOut">
               <a:rPr lang="en-US"/>
-              <a:t>5/27/2026</a:t>
+              <a:t>5/28/2026</a:t>
             </a:fld>
             <a:endParaRPr lang="en-US"/>
           </a:p>
@@ -7109,7 +7109,7 @@
           <a:p>
             <a:fld id="{1D8BD707-D9CF-40AE-B4C6-C98DA3205C09}" type="datetimeFigureOut">
               <a:rPr lang="en-US"/>
-              <a:t>5/27/2026</a:t>
+              <a:t>5/28/2026</a:t>
             </a:fld>
             <a:endParaRPr lang="en-US"/>
           </a:p>
@@ -7360,18 +7360,21 @@
             </a:pPr>
             <a:r>
               <a:rPr lang="en-US" sz="8000" spc="409" dirty="0" err="1">
-                <a:latin typeface="+mj-ea"/>
+                <a:latin typeface="標楷體" panose="03000509000000000000" pitchFamily="65" charset="-120"/>
+                <a:ea typeface="標楷體" panose="03000509000000000000" pitchFamily="65" charset="-120"/>
               </a:rPr>
               <a:t>Deepfake</a:t>
             </a:r>
             <a:r>
               <a:rPr sz="8000" spc="-10" dirty="0" err="1">
-                <a:latin typeface="+mj-ea"/>
+                <a:latin typeface="標楷體" panose="03000509000000000000" pitchFamily="65" charset="-120"/>
+                <a:ea typeface="標楷體" panose="03000509000000000000" pitchFamily="65" charset="-120"/>
               </a:rPr>
               <a:t>人臉偵測的應用程式</a:t>
             </a:r>
             <a:endParaRPr lang="en-US" sz="8000" spc="-10" dirty="0" err="1">
-              <a:latin typeface="+mj-ea"/>
+              <a:latin typeface="標楷體" panose="03000509000000000000" pitchFamily="65" charset="-120"/>
+              <a:ea typeface="標楷體" panose="03000509000000000000" pitchFamily="65" charset="-120"/>
             </a:endParaRPr>
           </a:p>
         </p:txBody>
@@ -7563,8 +7566,8 @@
             <a:lstStyle/>
             <a:p>
               <a:endParaRPr>
-                <a:latin typeface="+mj-ea"/>
-                <a:ea typeface="+mj-ea"/>
+                <a:latin typeface="標楷體" panose="03000509000000000000" pitchFamily="65" charset="-120"/>
+                <a:ea typeface="標楷體" panose="03000509000000000000" pitchFamily="65" charset="-120"/>
               </a:endParaRPr>
             </a:p>
           </p:txBody>
@@ -7670,8 +7673,8 @@
                 <a:solidFill>
                   <a:srgbClr val="FEFEFE"/>
                 </a:solidFill>
-                <a:latin typeface="+mj-ea"/>
-                <a:ea typeface="+mj-ea"/>
+                <a:latin typeface="標楷體" panose="03000509000000000000" pitchFamily="65" charset="-120"/>
+                <a:ea typeface="標楷體" panose="03000509000000000000" pitchFamily="65" charset="-120"/>
                 <a:cs typeface="Microsoft JhengHei"/>
               </a:rPr>
               <a:t>參與成</a:t>
@@ -7681,8 +7684,8 @@
                 <a:solidFill>
                   <a:srgbClr val="FEFEFE"/>
                 </a:solidFill>
-                <a:latin typeface="+mj-ea"/>
-                <a:ea typeface="+mj-ea"/>
+                <a:latin typeface="標楷體" panose="03000509000000000000" pitchFamily="65" charset="-120"/>
+                <a:ea typeface="標楷體" panose="03000509000000000000" pitchFamily="65" charset="-120"/>
                 <a:cs typeface="Microsoft JhengHei"/>
               </a:rPr>
               <a:t>員</a:t>
@@ -7692,8 +7695,8 @@
                 <a:solidFill>
                   <a:srgbClr val="FEFEFE"/>
                 </a:solidFill>
-                <a:latin typeface="+mj-ea"/>
-                <a:ea typeface="+mj-ea"/>
+                <a:latin typeface="標楷體" panose="03000509000000000000" pitchFamily="65" charset="-120"/>
+                <a:ea typeface="標楷體" panose="03000509000000000000" pitchFamily="65" charset="-120"/>
                 <a:cs typeface="Microsoft JhengHei"/>
               </a:rPr>
               <a:t>  </a:t>
@@ -7703,8 +7706,8 @@
                 <a:solidFill>
                   <a:srgbClr val="FEFEFE"/>
                 </a:solidFill>
-                <a:latin typeface="+mj-ea"/>
-                <a:ea typeface="+mj-ea"/>
+                <a:latin typeface="標楷體" panose="03000509000000000000" pitchFamily="65" charset="-120"/>
+                <a:ea typeface="標楷體" panose="03000509000000000000" pitchFamily="65" charset="-120"/>
                 <a:cs typeface="SimSun"/>
               </a:rPr>
               <a:t>林弘</a:t>
@@ -7714,8 +7717,8 @@
                 <a:solidFill>
                   <a:srgbClr val="FEFEFE"/>
                 </a:solidFill>
-                <a:latin typeface="+mj-ea"/>
-                <a:ea typeface="+mj-ea"/>
+                <a:latin typeface="標楷體" panose="03000509000000000000" pitchFamily="65" charset="-120"/>
+                <a:ea typeface="標楷體" panose="03000509000000000000" pitchFamily="65" charset="-120"/>
                 <a:cs typeface="SimSun"/>
               </a:rPr>
               <a:t>叡</a:t>
@@ -7725,8 +7728,8 @@
                 <a:solidFill>
                   <a:srgbClr val="FEFEFE"/>
                 </a:solidFill>
-                <a:latin typeface="+mj-ea"/>
-                <a:ea typeface="+mj-ea"/>
+                <a:latin typeface="標楷體" panose="03000509000000000000" pitchFamily="65" charset="-120"/>
+                <a:ea typeface="標楷體" panose="03000509000000000000" pitchFamily="65" charset="-120"/>
                 <a:cs typeface="SimSun"/>
               </a:rPr>
               <a:t> </a:t>
@@ -7736,8 +7739,8 @@
                 <a:solidFill>
                   <a:srgbClr val="FEFEFE"/>
                 </a:solidFill>
-                <a:latin typeface="+mj-ea"/>
-                <a:ea typeface="+mj-ea"/>
+                <a:latin typeface="標楷體" panose="03000509000000000000" pitchFamily="65" charset="-120"/>
+                <a:ea typeface="標楷體" panose="03000509000000000000" pitchFamily="65" charset="-120"/>
                 <a:cs typeface="SimSun"/>
               </a:rPr>
               <a:t>林泓</a:t>
@@ -7747,8 +7750,8 @@
                 <a:solidFill>
                   <a:srgbClr val="FEFEFE"/>
                 </a:solidFill>
-                <a:latin typeface="+mj-ea"/>
-                <a:ea typeface="+mj-ea"/>
+                <a:latin typeface="標楷體" panose="03000509000000000000" pitchFamily="65" charset="-120"/>
+                <a:ea typeface="標楷體" panose="03000509000000000000" pitchFamily="65" charset="-120"/>
                 <a:cs typeface="SimSun"/>
               </a:rPr>
               <a:t>宇</a:t>
@@ -7758,8 +7761,8 @@
                 <a:solidFill>
                   <a:srgbClr val="FEFEFE"/>
                 </a:solidFill>
-                <a:latin typeface="+mj-ea"/>
-                <a:ea typeface="+mj-ea"/>
+                <a:latin typeface="標楷體" panose="03000509000000000000" pitchFamily="65" charset="-120"/>
+                <a:ea typeface="標楷體" panose="03000509000000000000" pitchFamily="65" charset="-120"/>
                 <a:cs typeface="SimSun"/>
               </a:rPr>
               <a:t> </a:t>
@@ -7769,8 +7772,8 @@
                 <a:solidFill>
                   <a:srgbClr val="FEFEFE"/>
                 </a:solidFill>
-                <a:latin typeface="+mj-ea"/>
-                <a:ea typeface="+mj-ea"/>
+                <a:latin typeface="標楷體" panose="03000509000000000000" pitchFamily="65" charset="-120"/>
+                <a:ea typeface="標楷體" panose="03000509000000000000" pitchFamily="65" charset="-120"/>
                 <a:cs typeface="SimSun"/>
               </a:rPr>
               <a:t>許育</a:t>
@@ -7780,15 +7783,15 @@
                 <a:solidFill>
                   <a:srgbClr val="FEFEFE"/>
                 </a:solidFill>
-                <a:latin typeface="+mj-ea"/>
-                <a:ea typeface="+mj-ea"/>
+                <a:latin typeface="標楷體" panose="03000509000000000000" pitchFamily="65" charset="-120"/>
+                <a:ea typeface="標楷體" panose="03000509000000000000" pitchFamily="65" charset="-120"/>
                 <a:cs typeface="SimSun"/>
               </a:rPr>
               <a:t>豪</a:t>
             </a:r>
             <a:endParaRPr sz="4000" dirty="0">
-              <a:latin typeface="+mj-ea"/>
-              <a:ea typeface="+mj-ea"/>
+              <a:latin typeface="標楷體" panose="03000509000000000000" pitchFamily="65" charset="-120"/>
+              <a:ea typeface="標楷體" panose="03000509000000000000" pitchFamily="65" charset="-120"/>
               <a:cs typeface="SimSun"/>
             </a:endParaRPr>
           </a:p>
@@ -7828,8 +7831,8 @@
                 <a:solidFill>
                   <a:srgbClr val="FEFEFE"/>
                 </a:solidFill>
-                <a:latin typeface="+mj-ea"/>
-                <a:ea typeface="+mj-ea"/>
+                <a:latin typeface="標楷體" panose="03000509000000000000" pitchFamily="65" charset="-120"/>
+                <a:ea typeface="標楷體" panose="03000509000000000000" pitchFamily="65" charset="-120"/>
                 <a:cs typeface="Microsoft JhengHei"/>
               </a:rPr>
               <a:t>指導教</a:t>
@@ -7839,8 +7842,8 @@
                 <a:solidFill>
                   <a:srgbClr val="FEFEFE"/>
                 </a:solidFill>
-                <a:latin typeface="+mj-ea"/>
-                <a:ea typeface="+mj-ea"/>
+                <a:latin typeface="標楷體" panose="03000509000000000000" pitchFamily="65" charset="-120"/>
+                <a:ea typeface="標楷體" panose="03000509000000000000" pitchFamily="65" charset="-120"/>
                 <a:cs typeface="Microsoft JhengHei"/>
               </a:rPr>
               <a:t>授</a:t>
@@ -7850,8 +7853,8 @@
                 <a:solidFill>
                   <a:srgbClr val="FEFEFE"/>
                 </a:solidFill>
-                <a:latin typeface="+mj-ea"/>
-                <a:ea typeface="+mj-ea"/>
+                <a:latin typeface="標楷體" panose="03000509000000000000" pitchFamily="65" charset="-120"/>
+                <a:ea typeface="標楷體" panose="03000509000000000000" pitchFamily="65" charset="-120"/>
                 <a:cs typeface="Microsoft JhengHei"/>
               </a:rPr>
               <a:t>  </a:t>
@@ -7861,8 +7864,8 @@
                 <a:solidFill>
                   <a:srgbClr val="FEFEFE"/>
                 </a:solidFill>
-                <a:latin typeface="+mj-ea"/>
-                <a:ea typeface="+mj-ea"/>
+                <a:latin typeface="標楷體" panose="03000509000000000000" pitchFamily="65" charset="-120"/>
+                <a:ea typeface="標楷體" panose="03000509000000000000" pitchFamily="65" charset="-120"/>
                 <a:cs typeface="SimSun"/>
               </a:rPr>
               <a:t>江季翰教</a:t>
@@ -7872,15 +7875,15 @@
                 <a:solidFill>
                   <a:srgbClr val="FEFEFE"/>
                 </a:solidFill>
-                <a:latin typeface="+mj-ea"/>
-                <a:ea typeface="+mj-ea"/>
+                <a:latin typeface="標楷體" panose="03000509000000000000" pitchFamily="65" charset="-120"/>
+                <a:ea typeface="標楷體" panose="03000509000000000000" pitchFamily="65" charset="-120"/>
                 <a:cs typeface="SimSun"/>
               </a:rPr>
               <a:t>授</a:t>
             </a:r>
             <a:endParaRPr sz="4000" dirty="0">
-              <a:latin typeface="+mj-ea"/>
-              <a:ea typeface="+mj-ea"/>
+              <a:latin typeface="標楷體" panose="03000509000000000000" pitchFamily="65" charset="-120"/>
+              <a:ea typeface="標楷體" panose="03000509000000000000" pitchFamily="65" charset="-120"/>
               <a:cs typeface="SimSun"/>
             </a:endParaRPr>
           </a:p>
@@ -7895,7 +7898,7 @@
         <p:spPr>
           <a:xfrm>
             <a:off x="2076200" y="6267959"/>
-            <a:ext cx="1322825" cy="772904"/>
+            <a:ext cx="1322825" cy="786241"/>
           </a:xfrm>
           <a:prstGeom prst="rect">
             <a:avLst/>
@@ -7920,15 +7923,15 @@
                 <a:solidFill>
                   <a:srgbClr val="FEFEFE"/>
                 </a:solidFill>
-                <a:latin typeface="+mj-ea"/>
-                <a:ea typeface="+mj-ea"/>
+                <a:latin typeface="標楷體" panose="03000509000000000000" pitchFamily="65" charset="-120"/>
+                <a:ea typeface="標楷體" panose="03000509000000000000" pitchFamily="65" charset="-120"/>
                 <a:cs typeface="SimSun"/>
               </a:rPr>
               <a:t>動機</a:t>
             </a:r>
             <a:endParaRPr sz="4700" dirty="0">
-              <a:latin typeface="+mj-ea"/>
-              <a:ea typeface="+mj-ea"/>
+              <a:latin typeface="標楷體" panose="03000509000000000000" pitchFamily="65" charset="-120"/>
+              <a:ea typeface="標楷體" panose="03000509000000000000" pitchFamily="65" charset="-120"/>
               <a:cs typeface="SimSun"/>
             </a:endParaRPr>
           </a:p>
@@ -7943,7 +7946,7 @@
         <p:spPr>
           <a:xfrm>
             <a:off x="2076200" y="10733700"/>
-            <a:ext cx="1322825" cy="772904"/>
+            <a:ext cx="1322825" cy="786241"/>
           </a:xfrm>
           <a:prstGeom prst="rect">
             <a:avLst/>
@@ -7968,15 +7971,15 @@
                 <a:solidFill>
                   <a:srgbClr val="FEFEFE"/>
                 </a:solidFill>
-                <a:latin typeface="+mj-ea"/>
-                <a:ea typeface="+mj-ea"/>
+                <a:latin typeface="標楷體" panose="03000509000000000000" pitchFamily="65" charset="-120"/>
+                <a:ea typeface="標楷體" panose="03000509000000000000" pitchFamily="65" charset="-120"/>
                 <a:cs typeface="SimSun"/>
               </a:rPr>
               <a:t>目的</a:t>
             </a:r>
             <a:endParaRPr sz="4700" dirty="0">
-              <a:latin typeface="+mj-ea"/>
-              <a:ea typeface="+mj-ea"/>
+              <a:latin typeface="標楷體" panose="03000509000000000000" pitchFamily="65" charset="-120"/>
+              <a:ea typeface="標楷體" panose="03000509000000000000" pitchFamily="65" charset="-120"/>
               <a:cs typeface="SimSun"/>
             </a:endParaRPr>
           </a:p>
@@ -8033,8 +8036,8 @@
           <a:p>
             <a:pPr algn="ctr"/>
             <a:endParaRPr lang="zh-TW" altLang="en-US">
-              <a:latin typeface="+mj-ea"/>
-              <a:ea typeface="+mj-ea"/>
+              <a:latin typeface="標楷體" panose="03000509000000000000" pitchFamily="65" charset="-120"/>
+              <a:ea typeface="標楷體" panose="03000509000000000000" pitchFamily="65" charset="-120"/>
             </a:endParaRPr>
           </a:p>
         </p:txBody>
@@ -8060,7 +8063,7 @@
           </a:bodyPr>
           <a:lstStyle/>
           <a:p>
-            <a:pPr marL="584200" marR="151130" indent="-571500">
+            <a:pPr marL="584200" marR="151130" indent="-571500" algn="just">
               <a:lnSpc>
                 <a:spcPct val="115900"/>
               </a:lnSpc>
@@ -8071,20 +8074,12 @@
               <a:buChar char="v"/>
             </a:pPr>
             <a:r>
-              <a:rPr lang="en-US" sz="3750" dirty="0">
-                <a:solidFill>
-                  <a:schemeClr val="bg1"/>
-                </a:solidFill>
-                <a:latin typeface="+mj-ea"/>
-                <a:ea typeface="+mj-ea"/>
-              </a:rPr>
-              <a:t>j</a:t>
-            </a:r>
-            <a:r>
               <a:rPr lang="ja-JP" sz="3750" dirty="0">
                 <a:solidFill>
                   <a:schemeClr val="bg1"/>
                 </a:solidFill>
+                <a:latin typeface="標楷體" panose="03000509000000000000" pitchFamily="65" charset="-120"/>
+                <a:ea typeface="標楷體" panose="03000509000000000000" pitchFamily="65" charset="-120"/>
               </a:rPr>
               <a:t>我們希望能夠開發一款</a:t>
             </a:r>
@@ -8093,8 +8088,8 @@
                 <a:solidFill>
                   <a:schemeClr val="bg1"/>
                 </a:solidFill>
-                <a:latin typeface="+mj-ea"/>
-                <a:ea typeface="+mj-ea"/>
+                <a:latin typeface="標楷體" panose="03000509000000000000" pitchFamily="65" charset="-120"/>
+                <a:ea typeface="標楷體" panose="03000509000000000000" pitchFamily="65" charset="-120"/>
               </a:rPr>
               <a:t> </a:t>
             </a:r>
@@ -8103,8 +8098,9 @@
                 <a:solidFill>
                   <a:schemeClr val="bg1"/>
                 </a:solidFill>
-                <a:latin typeface="+mj-ea"/>
-                <a:ea typeface="+mj-ea"/>
+                <a:latin typeface="Times New Roman" panose="02020603050405020304" pitchFamily="18" charset="0"/>
+                <a:ea typeface="標楷體" panose="03000509000000000000" pitchFamily="65" charset="-120"/>
+                <a:cs typeface="Times New Roman" panose="02020603050405020304" pitchFamily="18" charset="0"/>
               </a:rPr>
               <a:t>Windows</a:t>
             </a:r>
@@ -8113,8 +8109,8 @@
                 <a:solidFill>
                   <a:schemeClr val="bg1"/>
                 </a:solidFill>
-                <a:latin typeface="+mj-ea"/>
-                <a:ea typeface="+mj-ea"/>
+                <a:latin typeface="標楷體" panose="03000509000000000000" pitchFamily="65" charset="-120"/>
+                <a:ea typeface="標楷體" panose="03000509000000000000" pitchFamily="65" charset="-120"/>
               </a:rPr>
               <a:t>即時偵測工具</a:t>
             </a:r>
@@ -8123,8 +8119,8 @@
                 <a:solidFill>
                   <a:schemeClr val="bg1"/>
                 </a:solidFill>
-                <a:latin typeface="+mj-ea"/>
-                <a:ea typeface="+mj-ea"/>
+                <a:latin typeface="標楷體" panose="03000509000000000000" pitchFamily="65" charset="-120"/>
+                <a:ea typeface="標楷體" panose="03000509000000000000" pitchFamily="65" charset="-120"/>
               </a:rPr>
               <a:t>，</a:t>
             </a:r>
@@ -8133,6 +8129,8 @@
                 <a:solidFill>
                   <a:schemeClr val="bg1"/>
                 </a:solidFill>
+                <a:latin typeface="標楷體" panose="03000509000000000000" pitchFamily="65" charset="-120"/>
+                <a:ea typeface="標楷體" panose="03000509000000000000" pitchFamily="65" charset="-120"/>
               </a:rPr>
               <a:t>讓使用者瀏覽畫面時能進行</a:t>
             </a:r>
@@ -8141,8 +8139,8 @@
                 <a:solidFill>
                   <a:schemeClr val="bg1"/>
                 </a:solidFill>
-                <a:latin typeface="+mj-ea"/>
-                <a:ea typeface="+mj-ea"/>
+                <a:latin typeface="標楷體" panose="03000509000000000000" pitchFamily="65" charset="-120"/>
+                <a:ea typeface="標楷體" panose="03000509000000000000" pitchFamily="65" charset="-120"/>
               </a:rPr>
               <a:t> </a:t>
             </a:r>
@@ -8151,6 +8149,8 @@
                 <a:solidFill>
                   <a:schemeClr val="bg1"/>
                 </a:solidFill>
+                <a:latin typeface="標楷體" panose="03000509000000000000" pitchFamily="65" charset="-120"/>
+                <a:ea typeface="標楷體" panose="03000509000000000000" pitchFamily="65" charset="-120"/>
               </a:rPr>
               <a:t>即時</a:t>
             </a:r>
@@ -8159,8 +8159,8 @@
                 <a:solidFill>
                   <a:schemeClr val="bg1"/>
                 </a:solidFill>
-                <a:latin typeface="+mj-ea"/>
-                <a:ea typeface="+mj-ea"/>
+                <a:latin typeface="標楷體" panose="03000509000000000000" pitchFamily="65" charset="-120"/>
+                <a:ea typeface="標楷體" panose="03000509000000000000" pitchFamily="65" charset="-120"/>
               </a:rPr>
               <a:t> </a:t>
             </a:r>
@@ -8169,18 +8169,29 @@
                 <a:solidFill>
                   <a:schemeClr val="bg1"/>
                 </a:solidFill>
-                <a:latin typeface="+mj-ea"/>
-                <a:ea typeface="+mj-ea"/>
+                <a:latin typeface="Times New Roman" panose="02020603050405020304" pitchFamily="18" charset="0"/>
+                <a:ea typeface="標楷體" panose="03000509000000000000" pitchFamily="65" charset="-120"/>
+                <a:cs typeface="Times New Roman" panose="02020603050405020304" pitchFamily="18" charset="0"/>
               </a:rPr>
-              <a:t>Deepfake </a:t>
+              <a:t>Deepfake</a:t>
+            </a:r>
+            <a:r>
+              <a:rPr sz="3750" dirty="0">
+                <a:solidFill>
+                  <a:schemeClr val="bg1"/>
+                </a:solidFill>
+                <a:latin typeface="標楷體" panose="03000509000000000000" pitchFamily="65" charset="-120"/>
+                <a:ea typeface="標楷體" panose="03000509000000000000" pitchFamily="65" charset="-120"/>
+              </a:rPr>
+              <a:t> </a:t>
             </a:r>
             <a:r>
               <a:rPr sz="3750" dirty="0" err="1">
                 <a:solidFill>
                   <a:schemeClr val="bg1"/>
                 </a:solidFill>
-                <a:latin typeface="+mj-ea"/>
-                <a:ea typeface="+mj-ea"/>
+                <a:latin typeface="標楷體" panose="03000509000000000000" pitchFamily="65" charset="-120"/>
+                <a:ea typeface="標楷體" panose="03000509000000000000" pitchFamily="65" charset="-120"/>
               </a:rPr>
               <a:t>偵測</a:t>
             </a:r>
@@ -8189,21 +8200,21 @@
                 <a:solidFill>
                   <a:schemeClr val="bg1"/>
                 </a:solidFill>
-                <a:latin typeface="+mj-ea"/>
-                <a:ea typeface="+mj-ea"/>
+                <a:latin typeface="標楷體" panose="03000509000000000000" pitchFamily="65" charset="-120"/>
+                <a:ea typeface="標楷體" panose="03000509000000000000" pitchFamily="65" charset="-120"/>
               </a:rPr>
               <a:t>。</a:t>
             </a:r>
-            <a:endParaRPr lang="en-US" sz="3750">
+            <a:endParaRPr lang="en-US" sz="3750" dirty="0">
               <a:solidFill>
                 <a:schemeClr val="bg1"/>
               </a:solidFill>
-              <a:latin typeface="+mj-ea"/>
-              <a:ea typeface="+mj-ea"/>
+              <a:latin typeface="標楷體" panose="03000509000000000000" pitchFamily="65" charset="-120"/>
+              <a:ea typeface="標楷體" panose="03000509000000000000" pitchFamily="65" charset="-120"/>
             </a:endParaRPr>
           </a:p>
           <a:p>
-            <a:pPr marL="584200" marR="5080" indent="-571500">
+            <a:pPr marL="584200" marR="5080" indent="-571500" algn="just">
               <a:lnSpc>
                 <a:spcPct val="115900"/>
               </a:lnSpc>
@@ -8215,8 +8226,8 @@
                 <a:solidFill>
                   <a:srgbClr val="FEFEFE"/>
                 </a:solidFill>
-                <a:latin typeface="ＭＳ Ｐゴシック"/>
-                <a:ea typeface="ＭＳ Ｐゴシック"/>
+                <a:latin typeface="標楷體" panose="03000509000000000000" pitchFamily="65" charset="-120"/>
+                <a:ea typeface="標楷體" panose="03000509000000000000" pitchFamily="65" charset="-120"/>
                 <a:cs typeface="SimSun"/>
               </a:rPr>
               <a:t>結合人臉偵測與</a:t>
@@ -8226,8 +8237,8 @@
                 <a:solidFill>
                   <a:srgbClr val="FEFEFE"/>
                 </a:solidFill>
-                <a:latin typeface="ＭＳ Ｐゴシック"/>
-                <a:ea typeface="ＭＳ Ｐゴシック"/>
+                <a:latin typeface="標楷體" panose="03000509000000000000" pitchFamily="65" charset="-120"/>
+                <a:ea typeface="標楷體" panose="03000509000000000000" pitchFamily="65" charset="-120"/>
                 <a:cs typeface="SimSun"/>
               </a:rPr>
               <a:t>  </a:t>
@@ -8237,9 +8248,9 @@
                 <a:solidFill>
                   <a:srgbClr val="FEFEFE"/>
                 </a:solidFill>
-                <a:latin typeface="+mj-ea"/>
-                <a:ea typeface="+mj-ea"/>
-                <a:cs typeface="SimSun"/>
+                <a:latin typeface="Times New Roman" panose="02020603050405020304" pitchFamily="18" charset="0"/>
+                <a:ea typeface="標楷體" panose="03000509000000000000" pitchFamily="65" charset="-120"/>
+                <a:cs typeface="Times New Roman" panose="02020603050405020304" pitchFamily="18" charset="0"/>
               </a:rPr>
               <a:t>FakeFormer</a:t>
             </a:r>
@@ -8248,8 +8259,8 @@
                 <a:solidFill>
                   <a:srgbClr val="FEFEFE"/>
                 </a:solidFill>
-                <a:latin typeface="+mj-ea"/>
-                <a:ea typeface="+mj-ea"/>
+                <a:latin typeface="標楷體" panose="03000509000000000000" pitchFamily="65" charset="-120"/>
+                <a:ea typeface="標楷體" panose="03000509000000000000" pitchFamily="65" charset="-120"/>
                 <a:cs typeface="SimSun"/>
               </a:rPr>
               <a:t> </a:t>
@@ -8259,6 +8270,8 @@
                 <a:solidFill>
                   <a:srgbClr val="FEFEFE"/>
                 </a:solidFill>
+                <a:latin typeface="標楷體" panose="03000509000000000000" pitchFamily="65" charset="-120"/>
+                <a:ea typeface="標楷體" panose="03000509000000000000" pitchFamily="65" charset="-120"/>
                 <a:cs typeface="SimSun"/>
               </a:rPr>
               <a:t> </a:t>
@@ -8268,6 +8281,8 @@
                 <a:solidFill>
                   <a:srgbClr val="FEFEFE"/>
                 </a:solidFill>
+                <a:latin typeface="標楷體" panose="03000509000000000000" pitchFamily="65" charset="-120"/>
+                <a:ea typeface="標楷體" panose="03000509000000000000" pitchFamily="65" charset="-120"/>
                 <a:cs typeface="SimSun"/>
               </a:rPr>
               <a:t> </a:t>
@@ -8277,8 +8292,8 @@
                 <a:solidFill>
                   <a:srgbClr val="FEFEFE"/>
                 </a:solidFill>
-                <a:latin typeface="ＭＳ Ｐゴシック"/>
-                <a:ea typeface="ＭＳ Ｐゴシック"/>
+                <a:latin typeface="標楷體" panose="03000509000000000000" pitchFamily="65" charset="-120"/>
+                <a:ea typeface="標楷體" panose="03000509000000000000" pitchFamily="65" charset="-120"/>
                 <a:cs typeface="SimSun"/>
               </a:rPr>
               <a:t>模</a:t>
@@ -8288,8 +8303,8 @@
                 <a:solidFill>
                   <a:srgbClr val="FEFEFE"/>
                 </a:solidFill>
-                <a:latin typeface="ＭＳ Ｐゴシック"/>
-                <a:ea typeface="ＭＳ Ｐゴシック"/>
+                <a:latin typeface="標楷體" panose="03000509000000000000" pitchFamily="65" charset="-120"/>
+                <a:ea typeface="標楷體" panose="03000509000000000000" pitchFamily="65" charset="-120"/>
                 <a:cs typeface="SimSun"/>
               </a:rPr>
               <a:t>型</a:t>
@@ -8299,8 +8314,8 @@
                 <a:solidFill>
                   <a:srgbClr val="FEFEFE"/>
                 </a:solidFill>
-                <a:latin typeface="+mj-ea"/>
-                <a:ea typeface="+mj-ea"/>
+                <a:latin typeface="標楷體" panose="03000509000000000000" pitchFamily="65" charset="-120"/>
+                <a:ea typeface="標楷體" panose="03000509000000000000" pitchFamily="65" charset="-120"/>
                 <a:cs typeface="SimSun"/>
               </a:rPr>
               <a:t>，</a:t>
@@ -8310,8 +8325,8 @@
                 <a:solidFill>
                   <a:srgbClr val="FEFEFE"/>
                 </a:solidFill>
-                <a:latin typeface="ＭＳ Ｐゴシック"/>
-                <a:ea typeface="ＭＳ Ｐゴシック"/>
+                <a:latin typeface="標楷體" panose="03000509000000000000" pitchFamily="65" charset="-120"/>
+                <a:ea typeface="標楷體" panose="03000509000000000000" pitchFamily="65" charset="-120"/>
                 <a:cs typeface="SimSun"/>
               </a:rPr>
               <a:t>分析畫面中的人臉是否疑似遭到偽造。</a:t>
@@ -8321,8 +8336,8 @@
                 <a:solidFill>
                   <a:srgbClr val="FEFEFE"/>
                 </a:solidFill>
-                <a:latin typeface="+mj-ea"/>
-                <a:ea typeface="+mj-ea"/>
+                <a:latin typeface="標楷體" panose="03000509000000000000" pitchFamily="65" charset="-120"/>
+                <a:ea typeface="標楷體" panose="03000509000000000000" pitchFamily="65" charset="-120"/>
                 <a:cs typeface="SimSun"/>
               </a:rPr>
               <a:t>當偵測到疑似</a:t>
@@ -8332,8 +8347,8 @@
                 <a:solidFill>
                   <a:srgbClr val="FEFEFE"/>
                 </a:solidFill>
-                <a:latin typeface="+mj-ea"/>
-                <a:ea typeface="+mj-ea"/>
+                <a:latin typeface="標楷體" panose="03000509000000000000" pitchFamily="65" charset="-120"/>
+                <a:ea typeface="標楷體" panose="03000509000000000000" pitchFamily="65" charset="-120"/>
                 <a:cs typeface="SimSun"/>
               </a:rPr>
               <a:t> </a:t>
@@ -8343,9 +8358,9 @@
                 <a:solidFill>
                   <a:srgbClr val="FEFEFE"/>
                 </a:solidFill>
-                <a:latin typeface="+mj-ea"/>
-                <a:ea typeface="+mj-ea"/>
-                <a:cs typeface="SimSun"/>
+                <a:latin typeface="Times New Roman" panose="02020603050405020304" pitchFamily="18" charset="0"/>
+                <a:ea typeface="標楷體" panose="03000509000000000000" pitchFamily="65" charset="-120"/>
+                <a:cs typeface="Times New Roman" panose="02020603050405020304" pitchFamily="18" charset="0"/>
               </a:rPr>
               <a:t>Deepfake</a:t>
             </a:r>
@@ -8354,8 +8369,8 @@
                 <a:solidFill>
                   <a:srgbClr val="FEFEFE"/>
                 </a:solidFill>
-                <a:latin typeface="+mj-ea"/>
-                <a:ea typeface="+mj-ea"/>
+                <a:latin typeface="標楷體" panose="03000509000000000000" pitchFamily="65" charset="-120"/>
+                <a:ea typeface="標楷體" panose="03000509000000000000" pitchFamily="65" charset="-120"/>
                 <a:cs typeface="SimSun"/>
               </a:rPr>
               <a:t> </a:t>
@@ -8365,8 +8380,8 @@
                 <a:solidFill>
                   <a:srgbClr val="FEFEFE"/>
                 </a:solidFill>
-                <a:latin typeface="+mj-ea"/>
-                <a:ea typeface="+mj-ea"/>
+                <a:latin typeface="標楷體" panose="03000509000000000000" pitchFamily="65" charset="-120"/>
+                <a:ea typeface="標楷體" panose="03000509000000000000" pitchFamily="65" charset="-120"/>
                 <a:cs typeface="SimSun"/>
               </a:rPr>
               <a:t>人</a:t>
@@ -8376,8 +8391,8 @@
                 <a:solidFill>
                   <a:srgbClr val="FEFEFE"/>
                 </a:solidFill>
-                <a:latin typeface="+mj-ea"/>
-                <a:ea typeface="+mj-ea"/>
+                <a:latin typeface="標楷體" panose="03000509000000000000" pitchFamily="65" charset="-120"/>
+                <a:ea typeface="標楷體" panose="03000509000000000000" pitchFamily="65" charset="-120"/>
                 <a:cs typeface="SimSun"/>
               </a:rPr>
               <a:t>臉時，跳出警示視窗提醒使用者</a:t>
@@ -8387,15 +8402,15 @@
                 <a:solidFill>
                   <a:srgbClr val="FEFEFE"/>
                 </a:solidFill>
-                <a:latin typeface="+mj-ea"/>
-                <a:ea typeface="+mj-ea"/>
+                <a:latin typeface="標楷體" panose="03000509000000000000" pitchFamily="65" charset="-120"/>
+                <a:ea typeface="標楷體" panose="03000509000000000000" pitchFamily="65" charset="-120"/>
                 <a:cs typeface="SimSun"/>
               </a:rPr>
               <a:t>。</a:t>
             </a:r>
             <a:endParaRPr sz="3750" dirty="0">
-              <a:latin typeface="+mj-ea"/>
-              <a:ea typeface="+mj-ea"/>
+              <a:latin typeface="標楷體" panose="03000509000000000000" pitchFamily="65" charset="-120"/>
+              <a:ea typeface="標楷體" panose="03000509000000000000" pitchFamily="65" charset="-120"/>
               <a:cs typeface="SimSun"/>
             </a:endParaRPr>
           </a:p>
@@ -8437,9 +8452,9 @@
                 <a:solidFill>
                   <a:srgbClr val="FEFEFE"/>
                 </a:solidFill>
-                <a:latin typeface="+mj-ea"/>
-                <a:ea typeface="+mj-ea"/>
-                <a:cs typeface="SimSun"/>
+                <a:latin typeface="Times New Roman" panose="02020603050405020304" pitchFamily="18" charset="0"/>
+                <a:ea typeface="標楷體" panose="03000509000000000000" pitchFamily="65" charset="-120"/>
+                <a:cs typeface="Times New Roman" panose="02020603050405020304" pitchFamily="18" charset="0"/>
               </a:rPr>
               <a:t>Deepfake</a:t>
             </a:r>
@@ -8448,8 +8463,8 @@
                 <a:solidFill>
                   <a:srgbClr val="FEFEFE"/>
                 </a:solidFill>
-                <a:latin typeface="+mj-ea"/>
-                <a:ea typeface="+mj-ea"/>
+                <a:latin typeface="標楷體" panose="03000509000000000000" pitchFamily="65" charset="-120"/>
+                <a:ea typeface="標楷體" panose="03000509000000000000" pitchFamily="65" charset="-120"/>
                 <a:cs typeface="SimSun"/>
               </a:rPr>
               <a:t> </a:t>
@@ -8459,8 +8474,8 @@
                 <a:solidFill>
                   <a:srgbClr val="FEFEFE"/>
                 </a:solidFill>
-                <a:latin typeface="+mj-ea"/>
-                <a:ea typeface="+mj-ea"/>
+                <a:latin typeface="標楷體" panose="03000509000000000000" pitchFamily="65" charset="-120"/>
+                <a:ea typeface="標楷體" panose="03000509000000000000" pitchFamily="65" charset="-120"/>
                 <a:cs typeface="SimSun"/>
               </a:rPr>
               <a:t>技術快速發展，已能高度擬真地偽造人</a:t>
@@ -8470,8 +8485,8 @@
                 <a:solidFill>
                   <a:srgbClr val="FEFEFE"/>
                 </a:solidFill>
-                <a:latin typeface="+mj-ea"/>
-                <a:ea typeface="+mj-ea"/>
+                <a:latin typeface="標楷體" panose="03000509000000000000" pitchFamily="65" charset="-120"/>
+                <a:ea typeface="標楷體" panose="03000509000000000000" pitchFamily="65" charset="-120"/>
                 <a:cs typeface="SimSun"/>
               </a:rPr>
               <a:t>臉表情、嘴型與臉部特徵。一般使用者難以辨識真偽，僅靠肉眼觀看影像或影片，容易誤信偽造內容</a:t>
@@ -8481,15 +8496,15 @@
                 <a:solidFill>
                   <a:srgbClr val="FEFEFE"/>
                 </a:solidFill>
-                <a:latin typeface="+mj-ea"/>
-                <a:ea typeface="+mj-ea"/>
+                <a:latin typeface="標楷體" panose="03000509000000000000" pitchFamily="65" charset="-120"/>
+                <a:ea typeface="標楷體" panose="03000509000000000000" pitchFamily="65" charset="-120"/>
                 <a:cs typeface="SimSun"/>
               </a:rPr>
               <a:t>。</a:t>
             </a:r>
             <a:endParaRPr lang="en-US" sz="3750" dirty="0">
-              <a:latin typeface="+mj-ea"/>
-              <a:ea typeface="+mj-ea"/>
+              <a:latin typeface="標楷體" panose="03000509000000000000" pitchFamily="65" charset="-120"/>
+              <a:ea typeface="標楷體" panose="03000509000000000000" pitchFamily="65" charset="-120"/>
               <a:cs typeface="SimSun"/>
             </a:endParaRPr>
           </a:p>
@@ -8506,8 +8521,8 @@
                 <a:solidFill>
                   <a:srgbClr val="FEFEFE"/>
                 </a:solidFill>
-                <a:latin typeface="+mj-ea"/>
-                <a:ea typeface="+mj-ea"/>
+                <a:latin typeface="標楷體" panose="03000509000000000000" pitchFamily="65" charset="-120"/>
+                <a:ea typeface="標楷體" panose="03000509000000000000" pitchFamily="65" charset="-120"/>
                 <a:cs typeface="SimSun"/>
               </a:rPr>
               <a:t>現有偵測方式缺乏即時性，多需手動匯入影像或影片，較不適合日常瀏覽情境使用</a:t>
@@ -8517,15 +8532,15 @@
                 <a:solidFill>
                   <a:srgbClr val="FEFEFE"/>
                 </a:solidFill>
-                <a:latin typeface="+mj-ea"/>
-                <a:ea typeface="+mj-ea"/>
+                <a:latin typeface="標楷體" panose="03000509000000000000" pitchFamily="65" charset="-120"/>
+                <a:ea typeface="標楷體" panose="03000509000000000000" pitchFamily="65" charset="-120"/>
                 <a:cs typeface="SimSun"/>
               </a:rPr>
               <a:t>。</a:t>
             </a:r>
             <a:endParaRPr sz="3750" dirty="0">
-              <a:latin typeface="+mj-ea"/>
-              <a:ea typeface="+mj-ea"/>
+              <a:latin typeface="標楷體" panose="03000509000000000000" pitchFamily="65" charset="-120"/>
+              <a:ea typeface="標楷體" panose="03000509000000000000" pitchFamily="65" charset="-120"/>
               <a:cs typeface="SimSun"/>
             </a:endParaRPr>
           </a:p>
@@ -8614,8 +8629,8 @@
                 <a:solidFill>
                   <a:schemeClr val="bg1"/>
                 </a:solidFill>
-                <a:latin typeface="+mj-ea"/>
-                <a:ea typeface="+mj-ea"/>
+                <a:latin typeface="標楷體" panose="03000509000000000000" pitchFamily="65" charset="-120"/>
+                <a:ea typeface="標楷體" panose="03000509000000000000" pitchFamily="65" charset="-120"/>
                 <a:cs typeface="SimSun"/>
               </a:rPr>
               <a:t>系統架構圖</a:t>
@@ -8624,8 +8639,8 @@
               <a:solidFill>
                 <a:schemeClr val="bg1"/>
               </a:solidFill>
-              <a:latin typeface="+mj-ea"/>
-              <a:ea typeface="+mj-ea"/>
+              <a:latin typeface="標楷體" panose="03000509000000000000" pitchFamily="65" charset="-120"/>
+              <a:ea typeface="標楷體" panose="03000509000000000000" pitchFamily="65" charset="-120"/>
               <a:cs typeface="SimSun"/>
             </a:endParaRPr>
           </a:p>
@@ -8676,7 +8691,10 @@
           <a:lstStyle/>
           <a:p>
             <a:pPr algn="ctr"/>
-            <a:endParaRPr lang="zh-TW" altLang="en-US"/>
+            <a:endParaRPr lang="zh-TW" altLang="en-US">
+              <a:latin typeface="標楷體" panose="03000509000000000000" pitchFamily="65" charset="-120"/>
+              <a:ea typeface="標楷體" panose="03000509000000000000" pitchFamily="65" charset="-120"/>
+            </a:endParaRPr>
           </a:p>
         </p:txBody>
       </p:sp>
@@ -8720,8 +8738,8 @@
                 <a:solidFill>
                   <a:schemeClr val="bg1"/>
                 </a:solidFill>
-                <a:latin typeface="+mj-ea"/>
-                <a:ea typeface="+mj-ea"/>
+                <a:latin typeface="標楷體" panose="03000509000000000000" pitchFamily="65" charset="-120"/>
+                <a:ea typeface="標楷體" panose="03000509000000000000" pitchFamily="65" charset="-120"/>
                 <a:cs typeface="SimSun"/>
               </a:rPr>
               <a:t>國立虎尾科技大學資訊工程系</a:t>
@@ -8730,8 +8748,8 @@
               <a:solidFill>
                 <a:schemeClr val="bg1"/>
               </a:solidFill>
-              <a:latin typeface="+mj-ea"/>
-              <a:ea typeface="+mj-ea"/>
+              <a:latin typeface="標楷體" panose="03000509000000000000" pitchFamily="65" charset="-120"/>
+              <a:ea typeface="標楷體" panose="03000509000000000000" pitchFamily="65" charset="-120"/>
               <a:cs typeface="SimSun"/>
             </a:endParaRPr>
           </a:p>
@@ -8777,9 +8795,9 @@
                 <a:solidFill>
                   <a:schemeClr val="bg1"/>
                 </a:solidFill>
-                <a:latin typeface="+mj-ea"/>
-                <a:ea typeface="+mj-ea"/>
-                <a:cs typeface="SimSun"/>
+                <a:latin typeface="Times New Roman" panose="02020603050405020304" pitchFamily="18" charset="0"/>
+                <a:ea typeface="標楷體" panose="03000509000000000000" pitchFamily="65" charset="-120"/>
+                <a:cs typeface="Times New Roman" panose="02020603050405020304" pitchFamily="18" charset="0"/>
               </a:rPr>
               <a:t>Computer Science &amp; Information Engineering</a:t>
             </a:r>
@@ -8787,9 +8805,9 @@
               <a:solidFill>
                 <a:schemeClr val="bg1"/>
               </a:solidFill>
-              <a:latin typeface="+mj-ea"/>
-              <a:ea typeface="+mj-ea"/>
-              <a:cs typeface="SimSun"/>
+              <a:latin typeface="Times New Roman" panose="02020603050405020304" pitchFamily="18" charset="0"/>
+              <a:ea typeface="標楷體" panose="03000509000000000000" pitchFamily="65" charset="-120"/>
+              <a:cs typeface="Times New Roman" panose="02020603050405020304" pitchFamily="18" charset="0"/>
             </a:endParaRPr>
           </a:p>
         </p:txBody>
@@ -8808,7 +8826,7 @@
         </p:nvSpPr>
         <p:spPr>
           <a:xfrm>
-            <a:off x="6255932" y="1909810"/>
+            <a:off x="4410591" y="1718380"/>
             <a:ext cx="12745665" cy="984885"/>
           </a:xfrm>
           <a:prstGeom prst="rect">
@@ -8825,27 +8843,52 @@
           </a:bodyPr>
           <a:lstStyle/>
           <a:p>
+            <a:pPr algn="ctr"/>
             <a:r>
               <a:rPr lang="en-US" sz="4000" dirty="0">
                 <a:solidFill>
                   <a:srgbClr val="FEFEFE"/>
                 </a:solidFill>
+                <a:latin typeface="Times New Roman" panose="02020603050405020304" pitchFamily="18" charset="0"/>
+                <a:ea typeface="標楷體" panose="03000509000000000000" pitchFamily="65" charset="-120"/>
+                <a:cs typeface="Times New Roman" panose="02020603050405020304" pitchFamily="18" charset="0"/>
               </a:rPr>
-              <a:t>Deepfake   Face Detection </a:t>
+              <a:t>Deepfake</a:t>
             </a:r>
             <a:r>
-              <a:rPr lang="en-US" sz="4000">
+              <a:rPr lang="zh-TW" altLang="en-US" sz="4000" dirty="0">
                 <a:solidFill>
                   <a:srgbClr val="FEFEFE"/>
                 </a:solidFill>
+                <a:latin typeface="Times New Roman" panose="02020603050405020304" pitchFamily="18" charset="0"/>
+                <a:ea typeface="標楷體" panose="03000509000000000000" pitchFamily="65" charset="-120"/>
+                <a:cs typeface="Times New Roman" panose="02020603050405020304" pitchFamily="18" charset="0"/>
               </a:rPr>
-              <a:t>Application Program</a:t>
+              <a:t> </a:t>
             </a:r>
-            <a:endParaRPr lang="en-US" dirty="0" err="1"/>
+            <a:r>
+              <a:rPr lang="en-US" sz="4000" dirty="0">
+                <a:solidFill>
+                  <a:srgbClr val="FEFEFE"/>
+                </a:solidFill>
+                <a:latin typeface="Times New Roman" panose="02020603050405020304" pitchFamily="18" charset="0"/>
+                <a:ea typeface="標楷體" panose="03000509000000000000" pitchFamily="65" charset="-120"/>
+                <a:cs typeface="Times New Roman" panose="02020603050405020304" pitchFamily="18" charset="0"/>
+              </a:rPr>
+              <a:t>Face Detection Application Program</a:t>
+            </a:r>
+            <a:endParaRPr lang="en-US" dirty="0">
+              <a:latin typeface="Times New Roman" panose="02020603050405020304" pitchFamily="18" charset="0"/>
+              <a:ea typeface="標楷體" panose="03000509000000000000" pitchFamily="65" charset="-120"/>
+              <a:cs typeface="Times New Roman" panose="02020603050405020304" pitchFamily="18" charset="0"/>
+            </a:endParaRPr>
           </a:p>
           <a:p>
             <a:pPr algn="ctr"/>
-            <a:endParaRPr lang="en-US"/>
+            <a:endParaRPr lang="en-US" dirty="0">
+              <a:latin typeface="標楷體" panose="03000509000000000000" pitchFamily="65" charset="-120"/>
+              <a:ea typeface="標楷體" panose="03000509000000000000" pitchFamily="65" charset="-120"/>
+            </a:endParaRPr>
           </a:p>
         </p:txBody>
       </p:sp>
